--- a/classes/parte-8-blue-team-deteccion-y-soc/196-automatizacion-con-soar/clase-196-presentacion.pptx
+++ b/classes/parte-8-blue-team-deteccion-y-soc/196-automatizacion-con-soar/clase-196-presentacion.pptx
@@ -17,6 +17,11 @@
     <p:sldId id="265" r:id="rId16"/>
     <p:sldId id="266" r:id="rId17"/>
     <p:sldId id="267" r:id="rId18"/>
+    <p:sldId id="268" r:id="rId19"/>
+    <p:sldId id="269" r:id="rId20"/>
+    <p:sldId id="270" r:id="rId21"/>
+    <p:sldId id="271" r:id="rId22"/>
+    <p:sldId id="272" r:id="rId23"/>
   </p:sldIdLst>
   <p:sldSz cx="9144000" cy="6858000" type="screen4x3"/>
   <p:notesSz cx="6858000" cy="9144000"/>
@@ -3198,7 +3203,7 @@
                   <a:srgbClr val="0B3D2E"/>
                 </a:solidFill>
               </a:rPr>
-              <a:t>⚠️ Errores comunes</a:t>
+              <a:t>🧰 Herramientas y preparación</a:t>
             </a:r>
           </a:p>
         </p:txBody>
@@ -3236,67 +3241,82 @@
                   <a:srgbClr val="22282E"/>
                 </a:solidFill>
               </a:rPr>
-              <a:t>•  Playbook aísla producción por error — Automatización destructiva sin control; añade human-in-the-loop</a:t>
-            </a:r>
-          </a:p>
-          <a:p>
-            <a:pPr>
-              <a:spcAft>
-                <a:spcPts val="600"/>
-              </a:spcAft>
-            </a:pPr>
-            <a:r>
-              <a:rPr sz="1500">
-                <a:solidFill>
-                  <a:srgbClr val="22282E"/>
-                </a:solidFill>
-              </a:rPr>
-              <a:t>•  Integración falla intermitente — API sin manejo de errores/reintentos; añade lógica de fallo</a:t>
-            </a:r>
-          </a:p>
-          <a:p>
-            <a:pPr>
-              <a:spcAft>
-                <a:spcPts val="600"/>
-              </a:spcAft>
-            </a:pPr>
-            <a:r>
-              <a:rPr sz="1500">
-                <a:solidFill>
-                  <a:srgbClr val="22282E"/>
-                </a:solidFill>
-              </a:rPr>
-              <a:t>•  Automatizas un proceso aún inestable — Automatizaste el caos; estabiliza el runbook manual primero</a:t>
-            </a:r>
-          </a:p>
-          <a:p>
-            <a:pPr>
-              <a:spcAft>
-                <a:spcPts val="600"/>
-              </a:spcAft>
-            </a:pPr>
-            <a:r>
-              <a:rPr sz="1500">
-                <a:solidFill>
-                  <a:srgbClr val="22282E"/>
-                </a:solidFill>
-              </a:rPr>
-              <a:t>•  Alertas se cierran solas mal clasificadas — Reglas de decisión pobres; ajusta umbrales y añade revisión</a:t>
-            </a:r>
-          </a:p>
-          <a:p>
-            <a:pPr>
-              <a:spcAft>
-                <a:spcPts val="600"/>
-              </a:spcAft>
-            </a:pPr>
-            <a:r>
-              <a:rPr sz="1500">
-                <a:solidFill>
-                  <a:srgbClr val="22282E"/>
-                </a:solidFill>
-              </a:rPr>
-              <a:t>•  Nadie confía en el SOAR — Falta transparencia; registra cada paso y hazlo auditable</a:t>
+              <a:t>•  En laboratorio aislado:</a:t>
+            </a:r>
+          </a:p>
+          <a:p>
+            <a:pPr>
+              <a:spcAft>
+                <a:spcPts val="600"/>
+              </a:spcAft>
+            </a:pPr>
+            <a:r>
+              <a:rPr sz="1500">
+                <a:solidFill>
+                  <a:srgbClr val="22282E"/>
+                </a:solidFill>
+              </a:rPr>
+              <a:t>•  Un SOAR open source: Shuffle o Tines (community), o n8n como orquestador genérico.</a:t>
+            </a:r>
+          </a:p>
+          <a:p>
+            <a:pPr>
+              <a:spcAft>
+                <a:spcPts val="600"/>
+              </a:spcAft>
+            </a:pPr>
+            <a:r>
+              <a:rPr sz="1500">
+                <a:solidFill>
+                  <a:srgbClr val="22282E"/>
+                </a:solidFill>
+              </a:rPr>
+              <a:t>•  TheHive + Cortex como plataforma de gestión de casos y analizadores.</a:t>
+            </a:r>
+          </a:p>
+          <a:p>
+            <a:pPr>
+              <a:spcAft>
+                <a:spcPts val="600"/>
+              </a:spcAft>
+            </a:pPr>
+            <a:r>
+              <a:rPr sz="1500">
+                <a:solidFill>
+                  <a:srgbClr val="22282E"/>
+                </a:solidFill>
+              </a:rPr>
+              <a:t>•  APIs de tus herramientas de laboratorio: SIEM (Splunk/Elastic), EDR (Velociraptor/Wazuh), TIP (MISP).</a:t>
+            </a:r>
+          </a:p>
+          <a:p>
+            <a:pPr>
+              <a:spcAft>
+                <a:spcPts val="600"/>
+              </a:spcAft>
+            </a:pPr>
+            <a:r>
+              <a:rPr sz="1500">
+                <a:solidFill>
+                  <a:srgbClr val="22282E"/>
+                </a:solidFill>
+              </a:rPr>
+              <a:t>•  Un buzón/alerta de phishing simulado para el caso de uso.</a:t>
+            </a:r>
+          </a:p>
+          <a:p>
+            <a:pPr>
+              <a:spcAft>
+                <a:spcPts val="600"/>
+              </a:spcAft>
+            </a:pPr>
+            <a:r>
+              <a:rPr sz="1500">
+                <a:solidFill>
+                  <a:srgbClr val="22282E"/>
+                </a:solidFill>
+              </a:rPr>
+              <a:t>•  Las acciones de respuesta se ejecutan solo contra tus sistemas de laboratorio; añade siempre aprobación humana antes de acciones destructivas.</a:t>
             </a:r>
           </a:p>
         </p:txBody>
@@ -3347,7 +3367,7 @@
                   <a:srgbClr val="0B3D2E"/>
                 </a:solidFill>
               </a:rPr>
-              <a:t>❓ Preguntas frecuentes</a:t>
+              <a:t>🧪 Laboratorio guiado — Un playbook de phishing</a:t>
             </a:r>
           </a:p>
         </p:txBody>
@@ -3385,82 +3405,97 @@
                   <a:srgbClr val="22282E"/>
                 </a:solidFill>
               </a:rPr>
-              <a:t>•  ❓ ¿SOAR reemplaza analistas?</a:t>
-            </a:r>
-          </a:p>
-          <a:p>
-            <a:pPr>
-              <a:spcAft>
-                <a:spcPts val="600"/>
-              </a:spcAft>
-            </a:pPr>
-            <a:r>
-              <a:rPr sz="1500">
-                <a:solidFill>
-                  <a:srgbClr val="22282E"/>
-                </a:solidFill>
-              </a:rPr>
-              <a:t>•  No. Automatiza lo repetitivo y libera al analista para investigación y decisiones. El criterio humano sigue siendo esencial, sobre todo en acciones destructivas.</a:t>
-            </a:r>
-          </a:p>
-          <a:p>
-            <a:pPr>
-              <a:spcAft>
-                <a:spcPts val="600"/>
-              </a:spcAft>
-            </a:pPr>
-            <a:r>
-              <a:rPr sz="1500">
-                <a:solidFill>
-                  <a:srgbClr val="22282E"/>
-                </a:solidFill>
-              </a:rPr>
-              <a:t>•  ❓ ¿Qué automatizo primero?</a:t>
-            </a:r>
-          </a:p>
-          <a:p>
-            <a:pPr>
-              <a:spcAft>
-                <a:spcPts val="600"/>
-              </a:spcAft>
-            </a:pPr>
-            <a:r>
-              <a:rPr sz="1500">
-                <a:solidFill>
-                  <a:srgbClr val="22282E"/>
-                </a:solidFill>
-              </a:rPr>
-              <a:t>•  Lo aburrido, frecuente y bien definido: enriquecimiento de indicadores, deduplicación de alertas, apertura de casos. Deja para después lo que requiere juicio.</a:t>
-            </a:r>
-          </a:p>
-          <a:p>
-            <a:pPr>
-              <a:spcAft>
-                <a:spcPts val="600"/>
-              </a:spcAft>
-            </a:pPr>
-            <a:r>
-              <a:rPr sz="1500">
-                <a:solidFill>
-                  <a:srgbClr val="22282E"/>
-                </a:solidFill>
-              </a:rPr>
-              <a:t>•  ❓ ¿Puedo automatizar la contención completa?</a:t>
-            </a:r>
-          </a:p>
-          <a:p>
-            <a:pPr>
-              <a:spcAft>
-                <a:spcPts val="600"/>
-              </a:spcAft>
-            </a:pPr>
-            <a:r>
-              <a:rPr sz="1500">
-                <a:solidFill>
-                  <a:srgbClr val="22282E"/>
-                </a:solidFill>
-              </a:rPr>
-              <a:t>•  Con cuidado y salvaguardas. Aislar un host o bloquear una IP puede impactar producción; muchos equipos exigen aprobación humana antes de acciones irreversibles.</a:t>
+              <a:t>•  Define el trigger. Una alerta de "posible phishing" (correo reportado) llega al SOAR vía webhook/API.</a:t>
+            </a:r>
+          </a:p>
+          <a:p>
+            <a:pPr>
+              <a:spcAft>
+                <a:spcPts val="600"/>
+              </a:spcAft>
+            </a:pPr>
+            <a:r>
+              <a:rPr sz="1500">
+                <a:solidFill>
+                  <a:srgbClr val="22282E"/>
+                </a:solidFill>
+              </a:rPr>
+              <a:t>•  Enriquece automáticamente. El playbook extrae URLs y adjuntos y consulta reputación (MISP/Cortex), WHOIS del dominio y hash del adjunto.</a:t>
+            </a:r>
+          </a:p>
+          <a:p>
+            <a:pPr>
+              <a:spcAft>
+                <a:spcPts val="600"/>
+              </a:spcAft>
+            </a:pPr>
+            <a:r>
+              <a:rPr sz="1500">
+                <a:solidFill>
+                  <a:srgbClr val="22282E"/>
+                </a:solidFill>
+              </a:rPr>
+              <a:t>•  Decide. Con reglas: si el dominio/hash es malicioso conocido → severidad alta; si es dudoso → crear caso para revisión humana.</a:t>
+            </a:r>
+          </a:p>
+          <a:p>
+            <a:pPr>
+              <a:spcAft>
+                <a:spcPts val="600"/>
+              </a:spcAft>
+            </a:pPr>
+            <a:r>
+              <a:rPr sz="1500">
+                <a:solidFill>
+                  <a:srgbClr val="22282E"/>
+                </a:solidFill>
+              </a:rPr>
+              <a:t>•  Contén (con aprobación). Para el caso malicioso, propón bloquear el dominio en el proxy y buscar otros destinatarios; ejecuta solo tras aprobación del analista (human-in-the-loop).</a:t>
+            </a:r>
+          </a:p>
+          <a:p>
+            <a:pPr>
+              <a:spcAft>
+                <a:spcPts val="600"/>
+              </a:spcAft>
+            </a:pPr>
+            <a:r>
+              <a:rPr sz="1500">
+                <a:solidFill>
+                  <a:srgbClr val="22282E"/>
+                </a:solidFill>
+              </a:rPr>
+              <a:t>•  Busca alcance. Consulta el SIEM: ¿quién más recibió/hizo clic? Añade los hallazgos al caso en TheHive.</a:t>
+            </a:r>
+          </a:p>
+          <a:p>
+            <a:pPr>
+              <a:spcAft>
+                <a:spcPts val="600"/>
+              </a:spcAft>
+            </a:pPr>
+            <a:r>
+              <a:rPr sz="1500">
+                <a:solidFill>
+                  <a:srgbClr val="22282E"/>
+                </a:solidFill>
+              </a:rPr>
+              <a:t>•  Notifica y documenta. El playbook actualiza el ticket, notifica al canal del SOC y adjunta el enriquecimiento.</a:t>
+            </a:r>
+          </a:p>
+          <a:p>
+            <a:pPr>
+              <a:spcAft>
+                <a:spcPts val="600"/>
+              </a:spcAft>
+            </a:pPr>
+            <a:r>
+              <a:rPr sz="1500">
+                <a:solidFill>
+                  <a:srgbClr val="22282E"/>
+                </a:solidFill>
+              </a:rPr>
+              <a:t>•  Mide. Compara el tiempo del flujo automatizado con el proceso manual equivalente.</a:t>
             </a:r>
           </a:p>
         </p:txBody>
@@ -3511,7 +3546,7 @@
                   <a:srgbClr val="0B3D2E"/>
                 </a:solidFill>
               </a:rPr>
-              <a:t>🔗 Referencias</a:t>
+              <a:t>✍️ Ejercicios</a:t>
             </a:r>
           </a:p>
         </p:txBody>
@@ -3549,71 +3584,712 @@
                   <a:srgbClr val="22282E"/>
                 </a:solidFill>
               </a:rPr>
-              <a:t>•  Murdoch, D. Blue Team Handbook: SOC, SIEM, and Threat Hunting Use Cases.</a:t>
-            </a:r>
-          </a:p>
-          <a:p>
-            <a:pPr>
-              <a:spcAft>
-                <a:spcPts val="600"/>
-              </a:spcAft>
-            </a:pPr>
-            <a:r>
-              <a:rPr sz="1500">
-                <a:solidFill>
-                  <a:srgbClr val="22282E"/>
-                </a:solidFill>
-              </a:rPr>
-              <a:t>•  TheHive &amp; Cortex — &lt;https://thehive-project.org/&gt;</a:t>
-            </a:r>
-          </a:p>
-          <a:p>
-            <a:pPr>
-              <a:spcAft>
-                <a:spcPts val="600"/>
-              </a:spcAft>
-            </a:pPr>
-            <a:r>
-              <a:rPr sz="1500">
-                <a:solidFill>
-                  <a:srgbClr val="22282E"/>
-                </a:solidFill>
-              </a:rPr>
-              <a:t>•  Shuffle SOAR — &lt;https://shuffler.io/&gt;</a:t>
-            </a:r>
-          </a:p>
-          <a:p>
-            <a:pPr>
-              <a:spcAft>
-                <a:spcPts val="600"/>
-              </a:spcAft>
-            </a:pPr>
-            <a:r>
-              <a:rPr sz="1500">
-                <a:solidFill>
-                  <a:srgbClr val="22282E"/>
-                </a:solidFill>
-              </a:rPr>
-              <a:t>•  Gartner, "Market Guide for SOAR Solutions" (marco conceptual).</a:t>
-            </a:r>
-          </a:p>
-          <a:p>
-            <a:pPr>
-              <a:spcAft>
-                <a:spcPts val="600"/>
-              </a:spcAft>
-            </a:pPr>
-            <a:r>
-              <a:rPr sz="1500">
-                <a:solidFill>
-                  <a:srgbClr val="22282E"/>
-                </a:solidFill>
-              </a:rPr>
-              <a:t>•  NIST SP 800-61r2, Computer Security Incident Handling Guide — &lt;https://csrc.nist.gov/pubs/sp/800/61/r2/final&gt;</a:t>
-            </a:r>
-          </a:p>
-        </p:txBody>
-      </p:sp>
+              <a:t>•  Diseña el diagrama de un playbook de "host comprometido" con puntos de aprobación.</a:t>
+            </a:r>
+          </a:p>
+          <a:p>
+            <a:pPr>
+              <a:spcAft>
+                <a:spcPts val="600"/>
+              </a:spcAft>
+            </a:pPr>
+            <a:r>
+              <a:rPr sz="1500">
+                <a:solidFill>
+                  <a:srgbClr val="22282E"/>
+                </a:solidFill>
+              </a:rPr>
+              <a:t>•  Enumera 5 tareas del SOC seguras de automatizar y 3 que no.</a:t>
+            </a:r>
+          </a:p>
+          <a:p>
+            <a:pPr>
+              <a:spcAft>
+                <a:spcPts val="600"/>
+              </a:spcAft>
+            </a:pPr>
+            <a:r>
+              <a:rPr sz="1500">
+                <a:solidFill>
+                  <a:srgbClr val="22282E"/>
+                </a:solidFill>
+              </a:rPr>
+              <a:t>•  Implementa un enriquecimiento automático de IP con reputación.</a:t>
+            </a:r>
+          </a:p>
+          <a:p>
+            <a:pPr>
+              <a:spcAft>
+                <a:spcPts val="600"/>
+              </a:spcAft>
+            </a:pPr>
+            <a:r>
+              <a:rPr sz="1500">
+                <a:solidFill>
+                  <a:srgbClr val="22282E"/>
+                </a:solidFill>
+              </a:rPr>
+              <a:t>•  Define las salvaguardas para una acción de "deshabilitar cuenta".</a:t>
+            </a:r>
+          </a:p>
+          <a:p>
+            <a:pPr>
+              <a:spcAft>
+                <a:spcPts val="600"/>
+              </a:spcAft>
+            </a:pPr>
+            <a:r>
+              <a:rPr sz="1500">
+                <a:solidFill>
+                  <a:srgbClr val="22282E"/>
+                </a:solidFill>
+              </a:rPr>
+              <a:t>•  Calcula el ahorro de MTTR de automatizar el triaje de phishing.</a:t>
+            </a:r>
+          </a:p>
+          <a:p>
+            <a:pPr>
+              <a:spcAft>
+                <a:spcPts val="600"/>
+              </a:spcAft>
+            </a:pPr>
+            <a:r>
+              <a:rPr sz="1500">
+                <a:solidFill>
+                  <a:srgbClr val="22282E"/>
+                </a:solidFill>
+              </a:rPr>
+              <a:t>•  Explica el riesgo de un playbook que aísla hosts sin control y cómo mitigarlo.</a:t>
+            </a:r>
+          </a:p>
+        </p:txBody>
+      </p:sp>
+    </p:spTree>
+  </p:cSld>
+  <p:clrMapOvr>
+    <a:masterClrMapping/>
+  </p:clrMapOvr>
+</p:sld>
+</file>
+
+<file path=ppt/slides/slide13.xml><?xml version="1.0" encoding="utf-8"?>
+<p:sld xmlns:a="http://schemas.openxmlformats.org/drawingml/2006/main" xmlns:p="http://schemas.openxmlformats.org/presentationml/2006/main" xmlns:r="http://schemas.openxmlformats.org/officeDocument/2006/relationships">
+  <p:cSld>
+    <p:spTree>
+      <p:nvGrpSpPr>
+        <p:cNvPr id="1" name=""/>
+        <p:cNvGrpSpPr/>
+        <p:nvPr/>
+      </p:nvGrpSpPr>
+      <p:grpSpPr/>
+      <p:sp>
+        <p:nvSpPr>
+          <p:cNvPr id="2" name="TextBox 1"/>
+          <p:cNvSpPr txBox="1"/>
+          <p:nvPr/>
+        </p:nvSpPr>
+        <p:spPr>
+          <a:xfrm>
+            <a:off x="457200" y="320040"/>
+            <a:ext cx="8229600" cy="822960"/>
+          </a:xfrm>
+          <a:prstGeom prst="rect">
+            <a:avLst/>
+          </a:prstGeom>
+          <a:noFill/>
+        </p:spPr>
+        <p:txBody>
+          <a:bodyPr wrap="square">
+            <a:spAutoFit/>
+          </a:bodyPr>
+          <a:lstStyle/>
+          <a:p>
+            <a:r>
+              <a:rPr sz="2600" b="1">
+                <a:solidFill>
+                  <a:srgbClr val="0B3D2E"/>
+                </a:solidFill>
+              </a:rPr>
+              <a:t>📝 Reto verificable</a:t>
+            </a:r>
+          </a:p>
+        </p:txBody>
+      </p:sp>
+      <p:sp>
+        <p:nvSpPr>
+          <p:cNvPr id="3" name="TextBox 2"/>
+          <p:cNvSpPr txBox="1"/>
+          <p:nvPr/>
+        </p:nvSpPr>
+        <p:spPr>
+          <a:xfrm>
+            <a:off x="457200" y="1280160"/>
+            <a:ext cx="8229600" cy="4937760"/>
+          </a:xfrm>
+          <a:prstGeom prst="rect">
+            <a:avLst/>
+          </a:prstGeom>
+          <a:noFill/>
+        </p:spPr>
+        <p:txBody>
+          <a:bodyPr wrap="square">
+            <a:spAutoFit/>
+          </a:bodyPr>
+          <a:lstStyle/>
+          <a:p>
+            <a:pPr>
+              <a:spcAft>
+                <a:spcPts val="600"/>
+              </a:spcAft>
+            </a:pPr>
+            <a:r>
+              <a:rPr sz="1500">
+                <a:solidFill>
+                  <a:srgbClr val="22282E"/>
+                </a:solidFill>
+              </a:rPr>
+              <a:t>•  Construye y ejecuta un playbook funcional en tu SOAR de laboratorio que enriquezca una alerta, decida su severidad y proponga una acción de contención con aprobación humana. Criterio de aceptación…</a:t>
+            </a:r>
+          </a:p>
+        </p:txBody>
+      </p:sp>
+    </p:spTree>
+  </p:cSld>
+  <p:clrMapOvr>
+    <a:masterClrMapping/>
+  </p:clrMapOvr>
+</p:sld>
+</file>
+
+<file path=ppt/slides/slide14.xml><?xml version="1.0" encoding="utf-8"?>
+<p:sld xmlns:a="http://schemas.openxmlformats.org/drawingml/2006/main" xmlns:p="http://schemas.openxmlformats.org/presentationml/2006/main" xmlns:r="http://schemas.openxmlformats.org/officeDocument/2006/relationships">
+  <p:cSld>
+    <p:spTree>
+      <p:nvGrpSpPr>
+        <p:cNvPr id="1" name=""/>
+        <p:cNvGrpSpPr/>
+        <p:nvPr/>
+      </p:nvGrpSpPr>
+      <p:grpSpPr/>
+      <p:sp>
+        <p:nvSpPr>
+          <p:cNvPr id="2" name="TextBox 1"/>
+          <p:cNvSpPr txBox="1"/>
+          <p:nvPr/>
+        </p:nvSpPr>
+        <p:spPr>
+          <a:xfrm>
+            <a:off x="457200" y="320040"/>
+            <a:ext cx="8229600" cy="822960"/>
+          </a:xfrm>
+          <a:prstGeom prst="rect">
+            <a:avLst/>
+          </a:prstGeom>
+          <a:noFill/>
+        </p:spPr>
+        <p:txBody>
+          <a:bodyPr wrap="square">
+            <a:spAutoFit/>
+          </a:bodyPr>
+          <a:lstStyle/>
+          <a:p>
+            <a:r>
+              <a:rPr sz="2600" b="1">
+                <a:solidFill>
+                  <a:srgbClr val="0B3D2E"/>
+                </a:solidFill>
+              </a:rPr>
+              <a:t>⚠️ Errores comunes</a:t>
+            </a:r>
+          </a:p>
+        </p:txBody>
+      </p:sp>
+      <p:sp>
+        <p:nvSpPr>
+          <p:cNvPr id="3" name="TextBox 2"/>
+          <p:cNvSpPr txBox="1"/>
+          <p:nvPr/>
+        </p:nvSpPr>
+        <p:spPr>
+          <a:xfrm>
+            <a:off x="457200" y="1280160"/>
+            <a:ext cx="8229600" cy="4937760"/>
+          </a:xfrm>
+          <a:prstGeom prst="rect">
+            <a:avLst/>
+          </a:prstGeom>
+          <a:noFill/>
+        </p:spPr>
+        <p:txBody>
+          <a:bodyPr wrap="square">
+            <a:spAutoFit/>
+          </a:bodyPr>
+          <a:lstStyle/>
+          <a:p>
+            <a:pPr>
+              <a:spcAft>
+                <a:spcPts val="600"/>
+              </a:spcAft>
+            </a:pPr>
+            <a:r>
+              <a:rPr sz="1500">
+                <a:solidFill>
+                  <a:srgbClr val="22282E"/>
+                </a:solidFill>
+              </a:rPr>
+              <a:t>•  Playbook aísla producción por error — Automatización destructiva sin control; añade human-in-the-loop</a:t>
+            </a:r>
+          </a:p>
+          <a:p>
+            <a:pPr>
+              <a:spcAft>
+                <a:spcPts val="600"/>
+              </a:spcAft>
+            </a:pPr>
+            <a:r>
+              <a:rPr sz="1500">
+                <a:solidFill>
+                  <a:srgbClr val="22282E"/>
+                </a:solidFill>
+              </a:rPr>
+              <a:t>•  Integración falla intermitente — API sin manejo de errores/reintentos; añade lógica de fallo</a:t>
+            </a:r>
+          </a:p>
+          <a:p>
+            <a:pPr>
+              <a:spcAft>
+                <a:spcPts val="600"/>
+              </a:spcAft>
+            </a:pPr>
+            <a:r>
+              <a:rPr sz="1500">
+                <a:solidFill>
+                  <a:srgbClr val="22282E"/>
+                </a:solidFill>
+              </a:rPr>
+              <a:t>•  Automatizas un proceso aún inestable — Automatizaste el caos; estabiliza el runbook manual primero</a:t>
+            </a:r>
+          </a:p>
+          <a:p>
+            <a:pPr>
+              <a:spcAft>
+                <a:spcPts val="600"/>
+              </a:spcAft>
+            </a:pPr>
+            <a:r>
+              <a:rPr sz="1500">
+                <a:solidFill>
+                  <a:srgbClr val="22282E"/>
+                </a:solidFill>
+              </a:rPr>
+              <a:t>•  Alertas se cierran solas mal clasificadas — Reglas de decisión pobres; ajusta umbrales y añade revisión</a:t>
+            </a:r>
+          </a:p>
+          <a:p>
+            <a:pPr>
+              <a:spcAft>
+                <a:spcPts val="600"/>
+              </a:spcAft>
+            </a:pPr>
+            <a:r>
+              <a:rPr sz="1500">
+                <a:solidFill>
+                  <a:srgbClr val="22282E"/>
+                </a:solidFill>
+              </a:rPr>
+              <a:t>•  Nadie confía en el SOAR — Falta transparencia; registra cada paso y hazlo auditable</a:t>
+            </a:r>
+          </a:p>
+        </p:txBody>
+      </p:sp>
+    </p:spTree>
+  </p:cSld>
+  <p:clrMapOvr>
+    <a:masterClrMapping/>
+  </p:clrMapOvr>
+</p:sld>
+</file>
+
+<file path=ppt/slides/slide15.xml><?xml version="1.0" encoding="utf-8"?>
+<p:sld xmlns:a="http://schemas.openxmlformats.org/drawingml/2006/main" xmlns:p="http://schemas.openxmlformats.org/presentationml/2006/main" xmlns:r="http://schemas.openxmlformats.org/officeDocument/2006/relationships">
+  <p:cSld>
+    <p:spTree>
+      <p:nvGrpSpPr>
+        <p:cNvPr id="1" name=""/>
+        <p:cNvGrpSpPr/>
+        <p:nvPr/>
+      </p:nvGrpSpPr>
+      <p:grpSpPr/>
+      <p:sp>
+        <p:nvSpPr>
+          <p:cNvPr id="2" name="TextBox 1"/>
+          <p:cNvSpPr txBox="1"/>
+          <p:nvPr/>
+        </p:nvSpPr>
+        <p:spPr>
+          <a:xfrm>
+            <a:off x="457200" y="320040"/>
+            <a:ext cx="8229600" cy="822960"/>
+          </a:xfrm>
+          <a:prstGeom prst="rect">
+            <a:avLst/>
+          </a:prstGeom>
+          <a:noFill/>
+        </p:spPr>
+        <p:txBody>
+          <a:bodyPr wrap="square">
+            <a:spAutoFit/>
+          </a:bodyPr>
+          <a:lstStyle/>
+          <a:p>
+            <a:r>
+              <a:rPr sz="2600" b="1">
+                <a:solidFill>
+                  <a:srgbClr val="0B3D2E"/>
+                </a:solidFill>
+              </a:rPr>
+              <a:t>❓ Preguntas frecuentes</a:t>
+            </a:r>
+          </a:p>
+        </p:txBody>
+      </p:sp>
+      <p:sp>
+        <p:nvSpPr>
+          <p:cNvPr id="3" name="TextBox 2"/>
+          <p:cNvSpPr txBox="1"/>
+          <p:nvPr/>
+        </p:nvSpPr>
+        <p:spPr>
+          <a:xfrm>
+            <a:off x="457200" y="1280160"/>
+            <a:ext cx="8229600" cy="4937760"/>
+          </a:xfrm>
+          <a:prstGeom prst="rect">
+            <a:avLst/>
+          </a:prstGeom>
+          <a:noFill/>
+        </p:spPr>
+        <p:txBody>
+          <a:bodyPr wrap="square">
+            <a:spAutoFit/>
+          </a:bodyPr>
+          <a:lstStyle/>
+          <a:p>
+            <a:pPr>
+              <a:spcAft>
+                <a:spcPts val="600"/>
+              </a:spcAft>
+            </a:pPr>
+            <a:r>
+              <a:rPr sz="1500">
+                <a:solidFill>
+                  <a:srgbClr val="22282E"/>
+                </a:solidFill>
+              </a:rPr>
+              <a:t>•  ❓ ¿SOAR reemplaza analistas?</a:t>
+            </a:r>
+          </a:p>
+          <a:p>
+            <a:pPr>
+              <a:spcAft>
+                <a:spcPts val="600"/>
+              </a:spcAft>
+            </a:pPr>
+            <a:r>
+              <a:rPr sz="1500">
+                <a:solidFill>
+                  <a:srgbClr val="22282E"/>
+                </a:solidFill>
+              </a:rPr>
+              <a:t>•  No. Automatiza lo repetitivo y libera al analista para investigación y decisiones. El criterio humano sigue siendo esencial, sobre todo en acciones destructivas.</a:t>
+            </a:r>
+          </a:p>
+          <a:p>
+            <a:pPr>
+              <a:spcAft>
+                <a:spcPts val="600"/>
+              </a:spcAft>
+            </a:pPr>
+            <a:r>
+              <a:rPr sz="1500">
+                <a:solidFill>
+                  <a:srgbClr val="22282E"/>
+                </a:solidFill>
+              </a:rPr>
+              <a:t>•  ❓ ¿Qué automatizo primero?</a:t>
+            </a:r>
+          </a:p>
+          <a:p>
+            <a:pPr>
+              <a:spcAft>
+                <a:spcPts val="600"/>
+              </a:spcAft>
+            </a:pPr>
+            <a:r>
+              <a:rPr sz="1500">
+                <a:solidFill>
+                  <a:srgbClr val="22282E"/>
+                </a:solidFill>
+              </a:rPr>
+              <a:t>•  Lo aburrido, frecuente y bien definido: enriquecimiento de indicadores, deduplicación de alertas, apertura de casos. Deja para después lo que requiere juicio.</a:t>
+            </a:r>
+          </a:p>
+          <a:p>
+            <a:pPr>
+              <a:spcAft>
+                <a:spcPts val="600"/>
+              </a:spcAft>
+            </a:pPr>
+            <a:r>
+              <a:rPr sz="1500">
+                <a:solidFill>
+                  <a:srgbClr val="22282E"/>
+                </a:solidFill>
+              </a:rPr>
+              <a:t>•  ❓ ¿Puedo automatizar la contención completa?</a:t>
+            </a:r>
+          </a:p>
+          <a:p>
+            <a:pPr>
+              <a:spcAft>
+                <a:spcPts val="600"/>
+              </a:spcAft>
+            </a:pPr>
+            <a:r>
+              <a:rPr sz="1500">
+                <a:solidFill>
+                  <a:srgbClr val="22282E"/>
+                </a:solidFill>
+              </a:rPr>
+              <a:t>•  Con cuidado y salvaguardas. Aislar un host o bloquear una IP puede impactar producción; muchos equipos exigen aprobación humana antes de acciones irreversibles.</a:t>
+            </a:r>
+          </a:p>
+        </p:txBody>
+      </p:sp>
+    </p:spTree>
+  </p:cSld>
+  <p:clrMapOvr>
+    <a:masterClrMapping/>
+  </p:clrMapOvr>
+</p:sld>
+</file>
+
+<file path=ppt/slides/slide16.xml><?xml version="1.0" encoding="utf-8"?>
+<p:sld xmlns:a="http://schemas.openxmlformats.org/drawingml/2006/main" xmlns:p="http://schemas.openxmlformats.org/presentationml/2006/main" xmlns:r="http://schemas.openxmlformats.org/officeDocument/2006/relationships">
+  <p:cSld>
+    <p:spTree>
+      <p:nvGrpSpPr>
+        <p:cNvPr id="1" name=""/>
+        <p:cNvGrpSpPr/>
+        <p:nvPr/>
+      </p:nvGrpSpPr>
+      <p:grpSpPr/>
+      <p:sp>
+        <p:nvSpPr>
+          <p:cNvPr id="2" name="TextBox 1"/>
+          <p:cNvSpPr txBox="1"/>
+          <p:nvPr/>
+        </p:nvSpPr>
+        <p:spPr>
+          <a:xfrm>
+            <a:off x="457200" y="320040"/>
+            <a:ext cx="8229600" cy="822960"/>
+          </a:xfrm>
+          <a:prstGeom prst="rect">
+            <a:avLst/>
+          </a:prstGeom>
+          <a:noFill/>
+        </p:spPr>
+        <p:txBody>
+          <a:bodyPr wrap="square">
+            <a:spAutoFit/>
+          </a:bodyPr>
+          <a:lstStyle/>
+          <a:p>
+            <a:r>
+              <a:rPr sz="2600" b="1">
+                <a:solidFill>
+                  <a:srgbClr val="0B3D2E"/>
+                </a:solidFill>
+              </a:rPr>
+              <a:t>🔗 Referencias verificables y alcance</a:t>
+            </a:r>
+          </a:p>
+        </p:txBody>
+      </p:sp>
+      <p:sp>
+        <p:nvSpPr>
+          <p:cNvPr id="3" name="TextBox 2"/>
+          <p:cNvSpPr txBox="1"/>
+          <p:nvPr/>
+        </p:nvSpPr>
+        <p:spPr>
+          <a:xfrm>
+            <a:off x="457200" y="1280160"/>
+            <a:ext cx="8229600" cy="4937760"/>
+          </a:xfrm>
+          <a:prstGeom prst="rect">
+            <a:avLst/>
+          </a:prstGeom>
+          <a:noFill/>
+        </p:spPr>
+        <p:txBody>
+          <a:bodyPr wrap="square">
+            <a:spAutoFit/>
+          </a:bodyPr>
+          <a:lstStyle/>
+          <a:p>
+            <a:pPr>
+              <a:spcAft>
+                <a:spcPts val="600"/>
+              </a:spcAft>
+            </a:pPr>
+            <a:r>
+              <a:rPr sz="1500">
+                <a:solidFill>
+                  <a:srgbClr val="22282E"/>
+                </a:solidFill>
+              </a:rPr>
+              <a:t>•  NIST SP 800-61 Rev. 3: fuente primaria para integrar respuesta, autoridad, comunicación, recuperación y mejora con la gestión de riesgo; no prescribe un producto SOAR —…</a:t>
+            </a:r>
+          </a:p>
+          <a:p>
+            <a:pPr>
+              <a:spcAft>
+                <a:spcPts val="600"/>
+              </a:spcAft>
+            </a:pPr>
+            <a:r>
+              <a:rPr sz="1500">
+                <a:solidFill>
+                  <a:srgbClr val="22282E"/>
+                </a:solidFill>
+              </a:rPr>
+              <a:t>•  TheHive 5, gestión de observables: documentación oficial para conservar observables, contexto y relaciones dentro de alertas y casos —…</a:t>
+            </a:r>
+          </a:p>
+          <a:p>
+            <a:pPr>
+              <a:spcAft>
+                <a:spcPts val="600"/>
+              </a:spcAft>
+            </a:pPr>
+            <a:r>
+              <a:rPr sz="1500">
+                <a:solidFill>
+                  <a:srgbClr val="22282E"/>
+                </a:solidFill>
+              </a:rPr>
+              <a:t>•  Shuffle, workflows: documentación oficial de triggers, nodos, variables, condiciones, autenticación, ejecuciones y revisiones — &lt;https://shuffler.io/docs/workflows&gt;</a:t>
+            </a:r>
+          </a:p>
+          <a:p>
+            <a:pPr>
+              <a:spcAft>
+                <a:spcPts val="600"/>
+              </a:spcAft>
+            </a:pPr>
+            <a:r>
+              <a:rPr sz="1500">
+                <a:solidFill>
+                  <a:srgbClr val="22282E"/>
+                </a:solidFill>
+              </a:rPr>
+              <a:t>•  Shuffle API: documentación oficial de autenticación y endpoints usada para razonar sobre contratos de integración — &lt;https://shuffler.io/docs/API&gt;</a:t>
+            </a:r>
+          </a:p>
+          <a:p>
+            <a:pPr>
+              <a:spcAft>
+                <a:spcPts val="600"/>
+              </a:spcAft>
+            </a:pPr>
+            <a:r>
+              <a:rPr sz="1500">
+                <a:solidFill>
+                  <a:srgbClr val="22282E"/>
+                </a:solidFill>
+              </a:rPr>
+              <a:t>•  Murdoch, D. Blue Team Handbook: SOC, SIEM, and Threat Hunting Use Cases: bibliografía profesional complementaria para casos operativos.</a:t>
+            </a:r>
+          </a:p>
+        </p:txBody>
+      </p:sp>
+    </p:spTree>
+  </p:cSld>
+  <p:clrMapOvr>
+    <a:masterClrMapping/>
+  </p:clrMapOvr>
+</p:sld>
+</file>
+
+<file path=ppt/slides/slide17.xml><?xml version="1.0" encoding="utf-8"?>
+<p:sld xmlns:a="http://schemas.openxmlformats.org/drawingml/2006/main" xmlns:p="http://schemas.openxmlformats.org/presentationml/2006/main" xmlns:r="http://schemas.openxmlformats.org/officeDocument/2006/relationships">
+  <p:cSld>
+    <p:spTree>
+      <p:nvGrpSpPr>
+        <p:cNvPr id="1" name=""/>
+        <p:cNvGrpSpPr/>
+        <p:nvPr/>
+      </p:nvGrpSpPr>
+      <p:grpSpPr/>
+      <p:sp>
+        <p:nvSpPr>
+          <p:cNvPr id="2" name="TextBox 1"/>
+          <p:cNvSpPr txBox="1"/>
+          <p:nvPr/>
+        </p:nvSpPr>
+        <p:spPr>
+          <a:xfrm>
+            <a:off x="457200" y="274320"/>
+            <a:ext cx="8229600" cy="640080"/>
+          </a:xfrm>
+          <a:prstGeom prst="rect">
+            <a:avLst/>
+          </a:prstGeom>
+          <a:noFill/>
+        </p:spPr>
+        <p:txBody>
+          <a:bodyPr wrap="square">
+            <a:spAutoFit/>
+          </a:bodyPr>
+          <a:lstStyle/>
+          <a:p>
+            <a:r>
+              <a:rPr sz="2200" b="1">
+                <a:solidFill>
+                  <a:srgbClr val="0B3D2E"/>
+                </a:solidFill>
+              </a:rPr>
+              <a:t>Diagrama de la clase</a:t>
+            </a:r>
+          </a:p>
+        </p:txBody>
+      </p:sp>
+      <p:pic>
+        <p:nvPicPr>
+          <p:cNvPr id="3" name="Picture 2" descr="878cd38814f8a867.png"/>
+          <p:cNvPicPr>
+            <a:picLocks noChangeAspect="1"/>
+          </p:cNvPicPr>
+          <p:nvPr/>
+        </p:nvPicPr>
+        <p:blipFill>
+          <a:blip r:embed="rId2"/>
+          <a:stretch>
+            <a:fillRect/>
+          </a:stretch>
+        </p:blipFill>
+        <p:spPr>
+          <a:xfrm>
+            <a:off x="3340826" y="1097280"/>
+            <a:ext cx="2462348" cy="5303520"/>
+          </a:xfrm>
+          <a:prstGeom prst="rect">
+            <a:avLst/>
+          </a:prstGeom>
+        </p:spPr>
+      </p:pic>
     </p:spTree>
   </p:cSld>
   <p:clrMapOvr>
@@ -3698,7 +4374,7 @@
                   <a:srgbClr val="22282E"/>
                 </a:solidFill>
               </a:rPr>
-              <a:t>•  Automatizar tareas repetitivas del SOC con SOAR (Security Orchestration, Automation and Response): playbooks que enriquecen alertas, deciden y ejecutan respuestas sin intervención humana para lo rutinario, reservando el criterio del analista para lo que importa. Construirás un playbook de principio a fin y entenderás dónde automatizar y dónde no.</a:t>
+              <a:t>•  Automatizar tareas repetitivas del SOC con SOAR (Security Orchestration, Automation and Response): playbooks que enriquecen alertas, deciden y ejecutan respuestas sin intervención humana para lo…</a:t>
             </a:r>
           </a:p>
         </p:txBody>
@@ -4092,7 +4768,7 @@
                   <a:srgbClr val="0B3D2E"/>
                 </a:solidFill>
               </a:rPr>
-              <a:t>📖 Definiciones y características</a:t>
+              <a:t>🧠 Explicación en profundidad</a:t>
             </a:r>
           </a:p>
         </p:txBody>
@@ -4130,97 +4806,97 @@
                   <a:srgbClr val="22282E"/>
                 </a:solidFill>
               </a:rPr>
-              <a:t>•  SOAR: plataforma que orquesta herramientas y automatiza flujos de respuesta. Característica: reduce trabajo manual y estandariza la reacción.</a:t>
-            </a:r>
-          </a:p>
-          <a:p>
-            <a:pPr>
-              <a:spcAft>
-                <a:spcPts val="600"/>
-              </a:spcAft>
-            </a:pPr>
-            <a:r>
-              <a:rPr sz="1500">
-                <a:solidFill>
-                  <a:srgbClr val="22282E"/>
-                </a:solidFill>
-              </a:rPr>
-              <a:t>•  Playbook: flujo definido de pasos ante un tipo de alerta. Característica: repetible, auditable y versionable.</a:t>
-            </a:r>
-          </a:p>
-          <a:p>
-            <a:pPr>
-              <a:spcAft>
-                <a:spcPts val="600"/>
-              </a:spcAft>
-            </a:pPr>
-            <a:r>
-              <a:rPr sz="1500">
-                <a:solidFill>
-                  <a:srgbClr val="22282E"/>
-                </a:solidFill>
-              </a:rPr>
-              <a:t>•  Enriquecimiento automatizado: consultar reputación, WHOIS, sandbox, activos de forma automática. Característica: acelera el triaje.</a:t>
-            </a:r>
-          </a:p>
-          <a:p>
-            <a:pPr>
-              <a:spcAft>
-                <a:spcPts val="600"/>
-              </a:spcAft>
-            </a:pPr>
-            <a:r>
-              <a:rPr sz="1500">
-                <a:solidFill>
-                  <a:srgbClr val="22282E"/>
-                </a:solidFill>
-              </a:rPr>
-              <a:t>•  Human-in-the-loop: puntos donde el flujo espera aprobación humana. Característica: evita acciones destructivas sin criterio.</a:t>
-            </a:r>
-          </a:p>
-          <a:p>
-            <a:pPr>
-              <a:spcAft>
-                <a:spcPts val="600"/>
-              </a:spcAft>
-            </a:pPr>
-            <a:r>
-              <a:rPr sz="1500">
-                <a:solidFill>
-                  <a:srgbClr val="22282E"/>
-                </a:solidFill>
-              </a:rPr>
-              <a:t>•  Orquestación: coordinar varias herramientas vía API. Característica: el SOAR "pega" el ecosistema.</a:t>
-            </a:r>
-          </a:p>
-          <a:p>
-            <a:pPr>
-              <a:spcAft>
-                <a:spcPts val="600"/>
-              </a:spcAft>
-            </a:pPr>
-            <a:r>
-              <a:rPr sz="1500">
-                <a:solidFill>
-                  <a:srgbClr val="22282E"/>
-                </a:solidFill>
-              </a:rPr>
-              <a:t>•  Acción de respuesta: aislar host, bloquear IP, deshabilitar cuenta. Característica: potente y potencialmente disruptiva; requiere salvaguardas.</a:t>
-            </a:r>
-          </a:p>
-          <a:p>
-            <a:pPr>
-              <a:spcAft>
-                <a:spcPts val="600"/>
-              </a:spcAft>
-            </a:pPr>
-            <a:r>
-              <a:rPr sz="1500">
-                <a:solidFill>
-                  <a:srgbClr val="22282E"/>
-                </a:solidFill>
-              </a:rPr>
-              <a:t>•  Runbook vs playbook: el runbook describe pasos (a veces manuales); el playbook los automatiza. Característica: el playbook es la versión ejecutable.</a:t>
+              <a:t>•  SOAR coordina sistemas, decisiones y evidencia. Orquestar hace que herramientas intercambien contexto; automatizar ejecuta pasos sin intervención. Un playbook serio es una máquina de estados con…</a:t>
+            </a:r>
+          </a:p>
+          <a:p>
+            <a:pPr>
+              <a:spcAft>
+                <a:spcPts val="600"/>
+              </a:spcAft>
+            </a:pPr>
+            <a:r>
+              <a:rPr sz="1500">
+                <a:solidFill>
+                  <a:srgbClr val="22282E"/>
+                </a:solidFill>
+              </a:rPr>
+              <a:t>•  Cada integración usa identidad mínima, secretos rotables y auditoría. Las acciones deben ser idempotentes o reconocer repeticiones; bloqueo y aislamiento necesitan duración, propietario y reversión.…</a:t>
+            </a:r>
+          </a:p>
+          <a:p>
+            <a:pPr>
+              <a:spcAft>
+                <a:spcPts val="600"/>
+              </a:spcAft>
+            </a:pPr>
+            <a:r>
+              <a:rPr sz="1500">
+                <a:solidFill>
+                  <a:srgbClr val="22282E"/>
+                </a:solidFill>
+              </a:rPr>
+              <a:t>•  Una alerta de phishing obliga a consultar reputación, obtener el mensaje, extraer URLs, buscar destinatarios, revisar autenticación, abrir un caso y decidir contención. Sin orquestación, el analista…</a:t>
+            </a:r>
+          </a:p>
+          <a:p>
+            <a:pPr>
+              <a:spcAft>
+                <a:spcPts val="600"/>
+              </a:spcAft>
+            </a:pPr>
+            <a:r>
+              <a:rPr sz="1500">
+                <a:solidFill>
+                  <a:srgbClr val="22282E"/>
+                </a:solidFill>
+              </a:rPr>
+              <a:t>•  NIST SP 800-61 Rev. 3 sitúa la respuesta dentro de la gestión de riesgo de CSF 2.0. Eso justifica que un playbook incluya impacto, autoridad, comunicación y recuperación, no solo llamadas API.…</a:t>
+            </a:r>
+          </a:p>
+          <a:p>
+            <a:pPr>
+              <a:spcAft>
+                <a:spcPts val="600"/>
+              </a:spcAft>
+            </a:pPr>
+            <a:r>
+              <a:rPr sz="1500">
+                <a:solidFill>
+                  <a:srgbClr val="22282E"/>
+                </a:solidFill>
+              </a:rPr>
+              <a:t>•  Cada paso declara entrada, salida, error y reintento. «Consultar reputación» recibe un observable validado y devuelve fuente, resultado, hora y confianza; no un booleano sin procedencia. Si la API no…</a:t>
+            </a:r>
+          </a:p>
+          <a:p>
+            <a:pPr>
+              <a:spcAft>
+                <a:spcPts val="600"/>
+              </a:spcAft>
+            </a:pPr>
+            <a:r>
+              <a:rPr sz="1500">
+                <a:solidFill>
+                  <a:srgbClr val="22282E"/>
+                </a:solidFill>
+              </a:rPr>
+              <a:t>•  Los gates humanos se ubican según impacto. Enriquecer puede ser automático; deshabilitar una cuenta privilegiada o aislar un servidor requiere contexto y aprobación. La aprobación muestra evidencia…</a:t>
+            </a:r>
+          </a:p>
+          <a:p>
+            <a:pPr>
+              <a:spcAft>
+                <a:spcPts val="600"/>
+              </a:spcAft>
+            </a:pPr>
+            <a:r>
+              <a:rPr sz="1500">
+                <a:solidFill>
+                  <a:srgbClr val="22282E"/>
+                </a:solidFill>
+              </a:rPr>
+              <a:t>•  Se empieza con tareas frecuentes, deterministas y reversibles. Primero se observa el playbook en modo recomendación y se compara con decisiones humanas; luego se automatizan pasos de bajo impacto. Se…</a:t>
             </a:r>
           </a:p>
         </p:txBody>
@@ -4271,7 +4947,7 @@
                   <a:srgbClr val="0B3D2E"/>
                 </a:solidFill>
               </a:rPr>
-              <a:t>🧰 Herramientas y preparación</a:t>
+              <a:t>📔 Glosario</a:t>
             </a:r>
           </a:p>
         </p:txBody>
@@ -4309,82 +4985,97 @@
                   <a:srgbClr val="22282E"/>
                 </a:solidFill>
               </a:rPr>
-              <a:t>•  En laboratorio aislado:</a:t>
-            </a:r>
-          </a:p>
-          <a:p>
-            <a:pPr>
-              <a:spcAft>
-                <a:spcPts val="600"/>
-              </a:spcAft>
-            </a:pPr>
-            <a:r>
-              <a:rPr sz="1500">
-                <a:solidFill>
-                  <a:srgbClr val="22282E"/>
-                </a:solidFill>
-              </a:rPr>
-              <a:t>•  Un SOAR open source: Shuffle o Tines (community), o n8n como orquestador genérico.</a:t>
-            </a:r>
-          </a:p>
-          <a:p>
-            <a:pPr>
-              <a:spcAft>
-                <a:spcPts val="600"/>
-              </a:spcAft>
-            </a:pPr>
-            <a:r>
-              <a:rPr sz="1500">
-                <a:solidFill>
-                  <a:srgbClr val="22282E"/>
-                </a:solidFill>
-              </a:rPr>
-              <a:t>•  TheHive + Cortex como plataforma de gestión de casos y analizadores.</a:t>
-            </a:r>
-          </a:p>
-          <a:p>
-            <a:pPr>
-              <a:spcAft>
-                <a:spcPts val="600"/>
-              </a:spcAft>
-            </a:pPr>
-            <a:r>
-              <a:rPr sz="1500">
-                <a:solidFill>
-                  <a:srgbClr val="22282E"/>
-                </a:solidFill>
-              </a:rPr>
-              <a:t>•  APIs de tus herramientas de laboratorio: SIEM (Splunk/Elastic), EDR (Velociraptor/Wazuh), TIP (MISP).</a:t>
-            </a:r>
-          </a:p>
-          <a:p>
-            <a:pPr>
-              <a:spcAft>
-                <a:spcPts val="600"/>
-              </a:spcAft>
-            </a:pPr>
-            <a:r>
-              <a:rPr sz="1500">
-                <a:solidFill>
-                  <a:srgbClr val="22282E"/>
-                </a:solidFill>
-              </a:rPr>
-              <a:t>•  Un buzón/alerta de phishing simulado para el caso de uso.</a:t>
-            </a:r>
-          </a:p>
-          <a:p>
-            <a:pPr>
-              <a:spcAft>
-                <a:spcPts val="600"/>
-              </a:spcAft>
-            </a:pPr>
-            <a:r>
-              <a:rPr sz="1500">
-                <a:solidFill>
-                  <a:srgbClr val="22282E"/>
-                </a:solidFill>
-              </a:rPr>
-              <a:t>•  Las acciones de respuesta se ejecutan solo contra tus sistemas de laboratorio; añade siempre aprobación humana antes de acciones destructivas.</a:t>
+              <a:t>•  SOAR: orquestación, automatización y respuesta.</a:t>
+            </a:r>
+          </a:p>
+          <a:p>
+            <a:pPr>
+              <a:spcAft>
+                <a:spcPts val="600"/>
+              </a:spcAft>
+            </a:pPr>
+            <a:r>
+              <a:rPr sz="1500">
+                <a:solidFill>
+                  <a:srgbClr val="22282E"/>
+                </a:solidFill>
+              </a:rPr>
+              <a:t>•  Orquestación: coordinación de herramientas y datos.</a:t>
+            </a:r>
+          </a:p>
+          <a:p>
+            <a:pPr>
+              <a:spcAft>
+                <a:spcPts val="600"/>
+              </a:spcAft>
+            </a:pPr>
+            <a:r>
+              <a:rPr sz="1500">
+                <a:solidFill>
+                  <a:srgbClr val="22282E"/>
+                </a:solidFill>
+              </a:rPr>
+              <a:t>•  Playbook: flujo ejecutable con decisiones.</a:t>
+            </a:r>
+          </a:p>
+          <a:p>
+            <a:pPr>
+              <a:spcAft>
+                <a:spcPts val="600"/>
+              </a:spcAft>
+            </a:pPr>
+            <a:r>
+              <a:rPr sz="1500">
+                <a:solidFill>
+                  <a:srgbClr val="22282E"/>
+                </a:solidFill>
+              </a:rPr>
+              <a:t>•  Idempotencia: repetición sin efectos adicionales indebidos.</a:t>
+            </a:r>
+          </a:p>
+          <a:p>
+            <a:pPr>
+              <a:spcAft>
+                <a:spcPts val="600"/>
+              </a:spcAft>
+            </a:pPr>
+            <a:r>
+              <a:rPr sz="1500">
+                <a:solidFill>
+                  <a:srgbClr val="22282E"/>
+                </a:solidFill>
+              </a:rPr>
+              <a:t>•  Human-in-the-loop: aprobación humana explícita.</a:t>
+            </a:r>
+          </a:p>
+          <a:p>
+            <a:pPr>
+              <a:spcAft>
+                <a:spcPts val="600"/>
+              </a:spcAft>
+            </a:pPr>
+            <a:r>
+              <a:rPr sz="1500">
+                <a:solidFill>
+                  <a:srgbClr val="22282E"/>
+                </a:solidFill>
+              </a:rPr>
+              <a:t>•  Rollback: reversión de una acción.</a:t>
+            </a:r>
+          </a:p>
+          <a:p>
+            <a:pPr>
+              <a:spcAft>
+                <a:spcPts val="600"/>
+              </a:spcAft>
+            </a:pPr>
+            <a:r>
+              <a:rPr sz="1500">
+                <a:solidFill>
+                  <a:srgbClr val="22282E"/>
+                </a:solidFill>
+              </a:rPr>
+              <a:t>•  Service account: identidad técnica limitada.</a:t>
             </a:r>
           </a:p>
         </p:txBody>
@@ -4435,7 +5126,7 @@
                   <a:srgbClr val="0B3D2E"/>
                 </a:solidFill>
               </a:rPr>
-              <a:t>🧪 Laboratorio guiado — Un playbook de phishing</a:t>
+              <a:t>📖 Definiciones y características</a:t>
             </a:r>
           </a:p>
         </p:txBody>
@@ -4473,97 +5164,97 @@
                   <a:srgbClr val="22282E"/>
                 </a:solidFill>
               </a:rPr>
-              <a:t>•  Define el trigger. Una alerta de "posible phishing" (correo reportado) llega al SOAR vía webhook/API.</a:t>
-            </a:r>
-          </a:p>
-          <a:p>
-            <a:pPr>
-              <a:spcAft>
-                <a:spcPts val="600"/>
-              </a:spcAft>
-            </a:pPr>
-            <a:r>
-              <a:rPr sz="1500">
-                <a:solidFill>
-                  <a:srgbClr val="22282E"/>
-                </a:solidFill>
-              </a:rPr>
-              <a:t>•  Enriquece automáticamente. El playbook extrae URLs y adjuntos y consulta reputación (MISP/Cortex), WHOIS del dominio y hash del adjunto.</a:t>
-            </a:r>
-          </a:p>
-          <a:p>
-            <a:pPr>
-              <a:spcAft>
-                <a:spcPts val="600"/>
-              </a:spcAft>
-            </a:pPr>
-            <a:r>
-              <a:rPr sz="1500">
-                <a:solidFill>
-                  <a:srgbClr val="22282E"/>
-                </a:solidFill>
-              </a:rPr>
-              <a:t>•  Decide. Con reglas: si el dominio/hash es malicioso conocido → severidad alta; si es dudoso → crear caso para revisión humana.</a:t>
-            </a:r>
-          </a:p>
-          <a:p>
-            <a:pPr>
-              <a:spcAft>
-                <a:spcPts val="600"/>
-              </a:spcAft>
-            </a:pPr>
-            <a:r>
-              <a:rPr sz="1500">
-                <a:solidFill>
-                  <a:srgbClr val="22282E"/>
-                </a:solidFill>
-              </a:rPr>
-              <a:t>•  Contén (con aprobación). Para el caso malicioso, propón bloquear el dominio en el proxy y buscar otros destinatarios; ejecuta solo tras aprobación del analista (human-in-the-loop).</a:t>
-            </a:r>
-          </a:p>
-          <a:p>
-            <a:pPr>
-              <a:spcAft>
-                <a:spcPts val="600"/>
-              </a:spcAft>
-            </a:pPr>
-            <a:r>
-              <a:rPr sz="1500">
-                <a:solidFill>
-                  <a:srgbClr val="22282E"/>
-                </a:solidFill>
-              </a:rPr>
-              <a:t>•  Busca alcance. Consulta el SIEM: ¿quién más recibió/hizo clic? Añade los hallazgos al caso en TheHive.</a:t>
-            </a:r>
-          </a:p>
-          <a:p>
-            <a:pPr>
-              <a:spcAft>
-                <a:spcPts val="600"/>
-              </a:spcAft>
-            </a:pPr>
-            <a:r>
-              <a:rPr sz="1500">
-                <a:solidFill>
-                  <a:srgbClr val="22282E"/>
-                </a:solidFill>
-              </a:rPr>
-              <a:t>•  Notifica y documenta. El playbook actualiza el ticket, notifica al canal del SOC y adjunta el enriquecimiento.</a:t>
-            </a:r>
-          </a:p>
-          <a:p>
-            <a:pPr>
-              <a:spcAft>
-                <a:spcPts val="600"/>
-              </a:spcAft>
-            </a:pPr>
-            <a:r>
-              <a:rPr sz="1500">
-                <a:solidFill>
-                  <a:srgbClr val="22282E"/>
-                </a:solidFill>
-              </a:rPr>
-              <a:t>•  Mide. Compara el tiempo del flujo automatizado con el proceso manual equivalente.</a:t>
+              <a:t>•  SOAR: plataforma que orquesta herramientas y automatiza flujos de respuesta. Característica: reduce trabajo manual y estandariza la reacción.</a:t>
+            </a:r>
+          </a:p>
+          <a:p>
+            <a:pPr>
+              <a:spcAft>
+                <a:spcPts val="600"/>
+              </a:spcAft>
+            </a:pPr>
+            <a:r>
+              <a:rPr sz="1500">
+                <a:solidFill>
+                  <a:srgbClr val="22282E"/>
+                </a:solidFill>
+              </a:rPr>
+              <a:t>•  Playbook: flujo definido de pasos ante un tipo de alerta. Característica: repetible, auditable y versionable.</a:t>
+            </a:r>
+          </a:p>
+          <a:p>
+            <a:pPr>
+              <a:spcAft>
+                <a:spcPts val="600"/>
+              </a:spcAft>
+            </a:pPr>
+            <a:r>
+              <a:rPr sz="1500">
+                <a:solidFill>
+                  <a:srgbClr val="22282E"/>
+                </a:solidFill>
+              </a:rPr>
+              <a:t>•  Enriquecimiento automatizado: consultar reputación, WHOIS, sandbox, activos de forma automática. Característica: acelera el triaje.</a:t>
+            </a:r>
+          </a:p>
+          <a:p>
+            <a:pPr>
+              <a:spcAft>
+                <a:spcPts val="600"/>
+              </a:spcAft>
+            </a:pPr>
+            <a:r>
+              <a:rPr sz="1500">
+                <a:solidFill>
+                  <a:srgbClr val="22282E"/>
+                </a:solidFill>
+              </a:rPr>
+              <a:t>•  Human-in-the-loop: puntos donde el flujo espera aprobación humana. Característica: evita acciones destructivas sin criterio.</a:t>
+            </a:r>
+          </a:p>
+          <a:p>
+            <a:pPr>
+              <a:spcAft>
+                <a:spcPts val="600"/>
+              </a:spcAft>
+            </a:pPr>
+            <a:r>
+              <a:rPr sz="1500">
+                <a:solidFill>
+                  <a:srgbClr val="22282E"/>
+                </a:solidFill>
+              </a:rPr>
+              <a:t>•  Orquestación: coordinar varias herramientas vía API. Característica: el SOAR "pega" el ecosistema.</a:t>
+            </a:r>
+          </a:p>
+          <a:p>
+            <a:pPr>
+              <a:spcAft>
+                <a:spcPts val="600"/>
+              </a:spcAft>
+            </a:pPr>
+            <a:r>
+              <a:rPr sz="1500">
+                <a:solidFill>
+                  <a:srgbClr val="22282E"/>
+                </a:solidFill>
+              </a:rPr>
+              <a:t>•  Acción de respuesta: aislar host, bloquear IP, deshabilitar cuenta. Característica: potente y potencialmente disruptiva; requiere salvaguardas.</a:t>
+            </a:r>
+          </a:p>
+          <a:p>
+            <a:pPr>
+              <a:spcAft>
+                <a:spcPts val="600"/>
+              </a:spcAft>
+            </a:pPr>
+            <a:r>
+              <a:rPr sz="1500">
+                <a:solidFill>
+                  <a:srgbClr val="22282E"/>
+                </a:solidFill>
+              </a:rPr>
+              <a:t>•  Runbook vs playbook: el runbook describe pasos (a veces manuales); el playbook los automatiza. Característica: el playbook es la versión ejecutable.</a:t>
             </a:r>
           </a:p>
         </p:txBody>
@@ -4614,7 +5305,7 @@
                   <a:srgbClr val="0B3D2E"/>
                 </a:solidFill>
               </a:rPr>
-              <a:t>✍️ Ejercicios</a:t>
+              <a:t>🔍 Playbook resuelto — correo sospechoso</a:t>
             </a:r>
           </a:p>
         </p:txBody>
@@ -4652,82 +5343,37 @@
                   <a:srgbClr val="22282E"/>
                 </a:solidFill>
               </a:rPr>
-              <a:t>•  Diseña el diagrama de un playbook de "host comprometido" con puntos de aprobación.</a:t>
-            </a:r>
-          </a:p>
-          <a:p>
-            <a:pPr>
-              <a:spcAft>
-                <a:spcPts val="600"/>
-              </a:spcAft>
-            </a:pPr>
-            <a:r>
-              <a:rPr sz="1500">
-                <a:solidFill>
-                  <a:srgbClr val="22282E"/>
-                </a:solidFill>
-              </a:rPr>
-              <a:t>•  Enumera 5 tareas del SOC seguras de automatizar y 3 que no.</a:t>
-            </a:r>
-          </a:p>
-          <a:p>
-            <a:pPr>
-              <a:spcAft>
-                <a:spcPts val="600"/>
-              </a:spcAft>
-            </a:pPr>
-            <a:r>
-              <a:rPr sz="1500">
-                <a:solidFill>
-                  <a:srgbClr val="22282E"/>
-                </a:solidFill>
-              </a:rPr>
-              <a:t>•  Implementa un enriquecimiento automático de IP con reputación.</a:t>
-            </a:r>
-          </a:p>
-          <a:p>
-            <a:pPr>
-              <a:spcAft>
-                <a:spcPts val="600"/>
-              </a:spcAft>
-            </a:pPr>
-            <a:r>
-              <a:rPr sz="1500">
-                <a:solidFill>
-                  <a:srgbClr val="22282E"/>
-                </a:solidFill>
-              </a:rPr>
-              <a:t>•  Define las salvaguardas para una acción de "deshabilitar cuenta".</a:t>
-            </a:r>
-          </a:p>
-          <a:p>
-            <a:pPr>
-              <a:spcAft>
-                <a:spcPts val="600"/>
-              </a:spcAft>
-            </a:pPr>
-            <a:r>
-              <a:rPr sz="1500">
-                <a:solidFill>
-                  <a:srgbClr val="22282E"/>
-                </a:solidFill>
-              </a:rPr>
-              <a:t>•  Calcula el ahorro de MTTR de automatizar el triaje de phishing.</a:t>
-            </a:r>
-          </a:p>
-          <a:p>
-            <a:pPr>
-              <a:spcAft>
-                <a:spcPts val="600"/>
-              </a:spcAft>
-            </a:pPr>
-            <a:r>
-              <a:rPr sz="1500">
-                <a:solidFill>
-                  <a:srgbClr val="22282E"/>
-                </a:solidFill>
-              </a:rPr>
-              <a:t>•  Explica el riesgo de un playbook que aísla hosts sin control y cómo mitigarlo.</a:t>
+              <a:t>•  El trigger recibe un mensaje reportado. El primer estado valida que existen mensaje original, destinatario e identificador; si falta alguno, crea una tarea humana y no declara benigno. Después extrae…</a:t>
+            </a:r>
+          </a:p>
+          <a:p>
+            <a:pPr>
+              <a:spcAft>
+                <a:spcPts val="600"/>
+              </a:spcAft>
+            </a:pPr>
+            <a:r>
+              <a:rPr sz="1500">
+                <a:solidFill>
+                  <a:srgbClr val="22282E"/>
+                </a:solidFill>
+              </a:rPr>
+              <a:t>•  Si la confianza es baja, el playbook recomienda acciones. Si se confirma campaña y el impacto está dentro de la política, retira mensajes; revocar sesiones o bloquear dominio compartido requiere…</a:t>
+            </a:r>
+          </a:p>
+          <a:p>
+            <a:pPr>
+              <a:spcAft>
+                <a:spcPts val="600"/>
+              </a:spcAft>
+            </a:pPr>
+            <a:r>
+              <a:rPr sz="1500">
+                <a:solidFill>
+                  <a:srgbClr val="22282E"/>
+                </a:solidFill>
+              </a:rPr>
+              <a:t>•  Las pruebas cubren mensaje malicioso, newsletter legítima, adjunto ausente, API caída, ejecución duplicada y reversión. Se compara tiempo y calidad con el proceso manual. Solo los pasos deterministas…</a:t>
             </a:r>
           </a:p>
         </p:txBody>
@@ -4778,7 +5424,7 @@
                   <a:srgbClr val="0B3D2E"/>
                 </a:solidFill>
               </a:rPr>
-              <a:t>📝 Reto verificable</a:t>
+              <a:t>✅ Criterio de dominio</a:t>
             </a:r>
           </a:p>
         </p:txBody>
@@ -4816,7 +5462,7 @@
                   <a:srgbClr val="22282E"/>
                 </a:solidFill>
               </a:rPr>
-              <a:t>•  Construye y ejecuta un playbook funcional en tu SOAR de laboratorio que enriquezca una alerta, decida su severidad y proponga una acción de contención con aprobación humana. Criterio de aceptación: ante una alerta de prueba, el playbook realiza el enriquecimiento automático, clasifica correctamente el caso, y NO ejecuta ninguna acción destructiva sin pasar por el punto de aprobación humana definido; el caso queda documentado en la plataforma.</a:t>
+              <a:t>•  El alumno entrega estados, contratos, errores, permisos, gates y rollback; demuestra auditoría y pruebas. Un diagrama lineal que solo funciona cuando todas las APIs responden no es un playbook…</a:t>
             </a:r>
           </a:p>
         </p:txBody>
